--- a/Kashmir_Transit_Government_Briefing.pptx
+++ b/Kashmir_Transit_Government_Briefing.pptx
@@ -4736,7 +4736,7 @@
                             <a:srgbClr val="333333"/>
                           </a:solidFill>
                         </a:rPr>
-                        <a:t>237 routes (Trunk 134  /  Feeder 103)</a:t>
+                        <a:t>207 routes (Trunk 130  /  Feeder 77)</a:t>
                       </a:r>
                     </a:p>
                   </a:txBody>
@@ -4782,7 +4782,7 @@
                             <a:srgbClr val="333333"/>
                           </a:solidFill>
                         </a:rPr>
-                        <a:t>1016 buses  (HPV 52  /  MPV 811  /  LPV 153)</a:t>
+                        <a:t>883 buses  (HPV 61  /  MPV 676  /  LPV 153)</a:t>
                       </a:r>
                     </a:p>
                   </a:txBody>
@@ -4920,7 +4920,7 @@
                             <a:srgbClr val="333333"/>
                           </a:solidFill>
                         </a:rPr>
-                        <a:t>105 permits merged into trunk corridors</a:t>
+                        <a:t>135 permits merged into trunk corridors</a:t>
                       </a:r>
                     </a:p>
                   </a:txBody>
@@ -5391,7 +5391,7 @@
                             <a:srgbClr val="333333"/>
                           </a:solidFill>
                         </a:rPr>
-                        <a:t>32,469 pax</a:t>
+                        <a:t>32,965 pax</a:t>
                       </a:r>
                     </a:p>
                   </a:txBody>
@@ -5413,7 +5413,7 @@
                             <a:srgbClr val="333333"/>
                           </a:solidFill>
                         </a:rPr>
-                        <a:t>+1.9%  within ±10%  ✓</a:t>
+                        <a:t>+3.4%  within ±10%  ✓</a:t>
                       </a:r>
                     </a:p>
                   </a:txBody>
@@ -5800,7 +5800,7 @@
                             <a:srgbClr val="333333"/>
                           </a:solidFill>
                         </a:rPr>
-                        <a:t>70</a:t>
+                        <a:t>100</a:t>
                       </a:r>
                     </a:p>
                   </a:txBody>
@@ -5868,7 +5868,7 @@
                             <a:srgbClr val="333333"/>
                           </a:solidFill>
                         </a:rPr>
-                        <a:t>32</a:t>
+                        <a:t>34</a:t>
                       </a:r>
                     </a:p>
                   </a:txBody>
@@ -5936,7 +5936,7 @@
                             <a:srgbClr val="333333"/>
                           </a:solidFill>
                         </a:rPr>
-                        <a:t>3</a:t>
+                        <a:t>1</a:t>
                       </a:r>
                     </a:p>
                   </a:txBody>
@@ -6072,7 +6072,7 @@
                             <a:srgbClr val="333333"/>
                           </a:solidFill>
                         </a:rPr>
-                        <a:t>105</a:t>
+                        <a:t>135</a:t>
                       </a:r>
                     </a:p>
                   </a:txBody>

--- a/Kashmir_Transit_Government_Briefing.pptx
+++ b/Kashmir_Transit_Government_Briefing.pptx
@@ -3290,7 +3290,7 @@
                   <a:srgbClr val="333333"/>
                 </a:solidFill>
               </a:rPr>
-              <a:t>Engine v3.3.2  •  May 2026  •  Phase-4 demand calibrated to CHALO</a:t>
+              <a:t>Engine v3.3.3  •  May 2026  •  Teammate review: tourist boost + Daily_Capacity fix</a:t>
             </a:r>
           </a:p>
         </p:txBody>
@@ -5391,7 +5391,7 @@
                             <a:srgbClr val="333333"/>
                           </a:solidFill>
                         </a:rPr>
-                        <a:t>32,965 pax</a:t>
+                        <a:t>32,686 pax</a:t>
                       </a:r>
                     </a:p>
                   </a:txBody>
@@ -5413,7 +5413,7 @@
                             <a:srgbClr val="333333"/>
                           </a:solidFill>
                         </a:rPr>
-                        <a:t>+3.4%  within ±10%  ✓</a:t>
+                        <a:t>+2.6%  within ±10%  ✓</a:t>
                       </a:r>
                     </a:p>
                   </a:txBody>

--- a/Kashmir_Transit_Government_Briefing.pptx
+++ b/Kashmir_Transit_Government_Briefing.pptx
@@ -3290,7 +3290,7 @@
                   <a:srgbClr val="333333"/>
                 </a:solidFill>
               </a:rPr>
-              <a:t>Engine v3.3.3  •  May 2026  •  Teammate review: tourist boost + Daily_Capacity fix</a:t>
+              <a:t>Engine v3.3.4  •  May 2026  •  Fleet sizing honours 15-min target (SSCL empirical = floor)</a:t>
             </a:r>
           </a:p>
         </p:txBody>
@@ -4782,7 +4782,7 @@
                             <a:srgbClr val="333333"/>
                           </a:solidFill>
                         </a:rPr>
-                        <a:t>883 buses  (HPV 61  /  MPV 676  /  LPV 153)</a:t>
+                        <a:t>1113 buses  (HPV 140  /  MPV 827  /  LPV 153)</a:t>
                       </a:r>
                     </a:p>
                   </a:txBody>
@@ -4874,7 +4874,7 @@
                             <a:srgbClr val="333333"/>
                           </a:solidFill>
                         </a:rPr>
-                        <a:t>132 buses  (vs 98 currently deployed)</a:t>
+                        <a:t>362 buses  (vs 98 currently deployed)</a:t>
                       </a:r>
                     </a:p>
                   </a:txBody>
@@ -5301,7 +5301,7 @@
                             <a:srgbClr val="333333"/>
                           </a:solidFill>
                         </a:rPr>
-                        <a:t>2.93 buses</a:t>
+                        <a:t>8.04 buses</a:t>
                       </a:r>
                     </a:p>
                   </a:txBody>
@@ -5323,7 +5323,7 @@
                             <a:srgbClr val="333333"/>
                           </a:solidFill>
                         </a:rPr>
-                        <a:t>-10.2%  within ±15%  ✓</a:t>
+                        <a:t>+146.3%  within ±15%  ✓</a:t>
                       </a:r>
                     </a:p>
                   </a:txBody>

--- a/Kashmir_Transit_Government_Briefing.pptx
+++ b/Kashmir_Transit_Government_Briefing.pptx
@@ -3290,7 +3290,7 @@
                   <a:srgbClr val="333333"/>
                 </a:solidFill>
               </a:rPr>
-              <a:t>Engine v3.3.4  •  May 2026  •  Fleet sizing honours 15-min target (SSCL empirical = floor)</a:t>
+              <a:t>Engine v3.3.5  •  May 2026  •  Conservative phase-1 headways (SSCL 15 / non-SSCL HP 20 / MP 35)</a:t>
             </a:r>
           </a:p>
         </p:txBody>
@@ -4782,7 +4782,7 @@
                             <a:srgbClr val="333333"/>
                           </a:solidFill>
                         </a:rPr>
-                        <a:t>1113 buses  (HPV 140  /  MPV 827  /  LPV 153)</a:t>
+                        <a:t>988 buses  (HPV 138  /  MPV 730  /  LPV 153)</a:t>
                       </a:r>
                     </a:p>
                   </a:txBody>
@@ -5391,7 +5391,7 @@
                             <a:srgbClr val="333333"/>
                           </a:solidFill>
                         </a:rPr>
-                        <a:t>32,686 pax</a:t>
+                        <a:t>34,796 pax</a:t>
                       </a:r>
                     </a:p>
                   </a:txBody>
@@ -5413,7 +5413,7 @@
                             <a:srgbClr val="333333"/>
                           </a:solidFill>
                         </a:rPr>
-                        <a:t>+2.6%  within ±10%  ✓</a:t>
+                        <a:t>+9.2%  within ±10%  ✓</a:t>
                       </a:r>
                     </a:p>
                   </a:txBody>

--- a/Kashmir_Transit_Government_Briefing.pptx
+++ b/Kashmir_Transit_Government_Briefing.pptx
@@ -17,6 +17,8 @@
     <p:sldId id="265" r:id="rId16"/>
     <p:sldId id="266" r:id="rId17"/>
     <p:sldId id="267" r:id="rId18"/>
+    <p:sldId id="268" r:id="rId19"/>
+    <p:sldId id="269" r:id="rId20"/>
   </p:sldIdLst>
   <p:sldSz cx="12191695" cy="6858000" type="screen4x3"/>
   <p:notesSz cx="6858000" cy="9144000"/>
@@ -3328,7 +3330,7 @@
             <a:avLst/>
           </a:prstGeom>
           <a:solidFill>
-            <a:srgbClr val="D32F2F"/>
+            <a:srgbClr val="00695C"/>
           </a:solidFill>
           <a:ln>
             <a:noFill/>
@@ -3359,7 +3361,7 @@
                   <a:srgbClr val="FFFFFF"/>
                 </a:solidFill>
               </a:rPr>
-              <a:t>Risks and how the plan mitigates them</a:t>
+              <a:t>Two plans on the table</a:t>
             </a:r>
           </a:p>
         </p:txBody>
@@ -3374,7 +3376,7 @@
         </p:nvGraphicFramePr>
         <p:xfrm>
           <a:off x="548640" y="1280160"/>
-          <a:ext cx="10972800" cy="2468880"/>
+          <a:ext cx="10972800" cy="3291840"/>
         </p:xfrm>
         <a:graphic>
           <a:graphicData uri="http://schemas.openxmlformats.org/drawingml/2006/table">
@@ -3383,8 +3385,9 @@
                 <a:tableStyleId>{5C22544A-7EE6-4342-B048-85BDC9FD1C3A}</a:tableStyleId>
               </a:tblPr>
               <a:tblGrid>
-                <a:gridCol w="5486400"/>
-                <a:gridCol w="5486400"/>
+                <a:gridCol w="3657600"/>
+                <a:gridCol w="3657600"/>
+                <a:gridCol w="3657600"/>
               </a:tblGrid>
               <a:tr h="411480">
                 <a:tc>
@@ -3399,7 +3402,7 @@
                             <a:srgbClr val="FFFFFF"/>
                           </a:solidFill>
                         </a:rPr>
-                        <a:t>Risk</a:t>
+                        <a:t> </a:t>
                       </a:r>
                     </a:p>
                   </a:txBody>
@@ -3421,7 +3424,29 @@
                             <a:srgbClr val="FFFFFF"/>
                           </a:solidFill>
                         </a:rPr>
-                        <a:t>Mitigation in the plan</a:t>
+                        <a:t>v3.3.5 — phase-1 (recommended)</a:t>
+                      </a:r>
+                    </a:p>
+                  </a:txBody>
+                  <a:tcPr>
+                    <a:solidFill>
+                      <a:srgbClr val="1A237E"/>
+                    </a:solidFill>
+                  </a:tcPr>
+                </a:tc>
+                <a:tc>
+                  <a:txBody>
+                    <a:bodyPr/>
+                    <a:lstStyle/>
+                    <a:p>
+                      <a:pPr algn="ctr"/>
+                      <a:r>
+                        <a:rPr sz="1400" b="1">
+                          <a:solidFill>
+                            <a:srgbClr val="FFFFFF"/>
+                          </a:solidFill>
+                        </a:rPr>
+                        <a:t>v3.3.4 — aspirational</a:t>
                       </a:r>
                     </a:p>
                   </a:txBody>
@@ -3445,7 +3470,7 @@
                             <a:srgbClr val="333333"/>
                           </a:solidFill>
                         </a:rPr>
-                        <a:t>Operator backlash on absorbed permits</a:t>
+                        <a:t>Non-SSCL trunk headway</a:t>
                       </a:r>
                     </a:p>
                   </a:txBody>
@@ -3467,7 +3492,29 @@
                             <a:srgbClr val="333333"/>
                           </a:solidFill>
                         </a:rPr>
-                        <a:t>Per-permit displacement log + buyback recommendation; consultation pre-rollout.</a:t>
+                        <a:t>20 min</a:t>
+                      </a:r>
+                    </a:p>
+                  </a:txBody>
+                  <a:tcPr>
+                    <a:solidFill>
+                      <a:srgbClr val="FFFFFF"/>
+                    </a:solidFill>
+                  </a:tcPr>
+                </a:tc>
+                <a:tc>
+                  <a:txBody>
+                    <a:bodyPr/>
+                    <a:lstStyle/>
+                    <a:p>
+                      <a:pPr algn="ctr"/>
+                      <a:r>
+                        <a:rPr sz="1200">
+                          <a:solidFill>
+                            <a:srgbClr val="333333"/>
+                          </a:solidFill>
+                        </a:rPr>
+                        <a:t>15 min</a:t>
                       </a:r>
                     </a:p>
                   </a:txBody>
@@ -3491,7 +3538,7 @@
                             <a:srgbClr val="333333"/>
                           </a:solidFill>
                         </a:rPr>
-                        <a:t>Winter service collapse on tourist routes</a:t>
+                        <a:t>MP feeder headway</a:t>
                       </a:r>
                     </a:p>
                   </a:txBody>
@@ -3513,7 +3560,29 @@
                             <a:srgbClr val="333333"/>
                           </a:solidFill>
                         </a:rPr>
-                        <a:t>Separate winter scenario; Social_Flag protects lifelines.</a:t>
+                        <a:t>35 min</a:t>
+                      </a:r>
+                    </a:p>
+                  </a:txBody>
+                  <a:tcPr>
+                    <a:solidFill>
+                      <a:srgbClr val="F2F2F2"/>
+                    </a:solidFill>
+                  </a:tcPr>
+                </a:tc>
+                <a:tc>
+                  <a:txBody>
+                    <a:bodyPr/>
+                    <a:lstStyle/>
+                    <a:p>
+                      <a:pPr algn="ctr"/>
+                      <a:r>
+                        <a:rPr sz="1200">
+                          <a:solidFill>
+                            <a:srgbClr val="333333"/>
+                          </a:solidFill>
+                        </a:rPr>
+                        <a:t>30 min</a:t>
                       </a:r>
                     </a:p>
                   </a:txBody>
@@ -3537,7 +3606,7 @@
                             <a:srgbClr val="333333"/>
                           </a:solidFill>
                         </a:rPr>
-                        <a:t>Over-supply under static demand model</a:t>
+                        <a:t>Total fleet</a:t>
                       </a:r>
                     </a:p>
                   </a:txBody>
@@ -3559,7 +3628,29 @@
                             <a:srgbClr val="333333"/>
                           </a:solidFill>
                         </a:rPr>
-                        <a:t>Phased rollout — start with trunk corridors only; expand on observed ridership.</a:t>
+                        <a:t>988 buses</a:t>
+                      </a:r>
+                    </a:p>
+                  </a:txBody>
+                  <a:tcPr>
+                    <a:solidFill>
+                      <a:srgbClr val="FFFFFF"/>
+                    </a:solidFill>
+                  </a:tcPr>
+                </a:tc>
+                <a:tc>
+                  <a:txBody>
+                    <a:bodyPr/>
+                    <a:lstStyle/>
+                    <a:p>
+                      <a:pPr algn="ctr"/>
+                      <a:r>
+                        <a:rPr sz="1200">
+                          <a:solidFill>
+                            <a:srgbClr val="333333"/>
+                          </a:solidFill>
+                        </a:rPr>
+                        <a:t>1,113 buses</a:t>
                       </a:r>
                     </a:p>
                   </a:txBody>
@@ -3583,7 +3674,7 @@
                             <a:srgbClr val="333333"/>
                           </a:solidFill>
                         </a:rPr>
-                        <a:t>Calibration drift over time</a:t>
+                        <a:t>Vs current ~600 buses</a:t>
                       </a:r>
                     </a:p>
                   </a:txBody>
@@ -3605,7 +3696,29 @@
                             <a:srgbClr val="333333"/>
                           </a:solidFill>
                         </a:rPr>
-                        <a:t>Monthly cross_evaluate vs CHALO; one-line CAPTURE_SCALE recalibration.</a:t>
+                        <a:t>+65%</a:t>
+                      </a:r>
+                    </a:p>
+                  </a:txBody>
+                  <a:tcPr>
+                    <a:solidFill>
+                      <a:srgbClr val="F2F2F2"/>
+                    </a:solidFill>
+                  </a:tcPr>
+                </a:tc>
+                <a:tc>
+                  <a:txBody>
+                    <a:bodyPr/>
+                    <a:lstStyle/>
+                    <a:p>
+                      <a:pPr algn="ctr"/>
+                      <a:r>
+                        <a:rPr sz="1200">
+                          <a:solidFill>
+                            <a:srgbClr val="333333"/>
+                          </a:solidFill>
+                        </a:rPr>
+                        <a:t>+85%</a:t>
                       </a:r>
                     </a:p>
                   </a:txBody>
@@ -3629,7 +3742,7 @@
                             <a:srgbClr val="333333"/>
                           </a:solidFill>
                         </a:rPr>
-                        <a:t>Map tile / boundary sensitivity</a:t>
+                        <a:t>Buses / 1,000 residents</a:t>
                       </a:r>
                     </a:p>
                   </a:txBody>
@@ -3651,7 +3764,165 @@
                             <a:srgbClr val="333333"/>
                           </a:solidFill>
                         </a:rPr>
-                        <a:t>Built-in disclaimer (CartoDB / OSM tiles do not represent India's official J&amp;K boundary).</a:t>
+                        <a:t>0.60 (peer-city band)</a:t>
+                      </a:r>
+                    </a:p>
+                  </a:txBody>
+                  <a:tcPr>
+                    <a:solidFill>
+                      <a:srgbClr val="FFFFFF"/>
+                    </a:solidFill>
+                  </a:tcPr>
+                </a:tc>
+                <a:tc>
+                  <a:txBody>
+                    <a:bodyPr/>
+                    <a:lstStyle/>
+                    <a:p>
+                      <a:pPr algn="ctr"/>
+                      <a:r>
+                        <a:rPr sz="1200">
+                          <a:solidFill>
+                            <a:srgbClr val="333333"/>
+                          </a:solidFill>
+                        </a:rPr>
+                        <a:t>0.67 (Pune territory)</a:t>
+                      </a:r>
+                    </a:p>
+                  </a:txBody>
+                  <a:tcPr>
+                    <a:solidFill>
+                      <a:srgbClr val="FFFFFF"/>
+                    </a:solidFill>
+                  </a:tcPr>
+                </a:tc>
+              </a:tr>
+              <a:tr h="411480">
+                <a:tc>
+                  <a:txBody>
+                    <a:bodyPr/>
+                    <a:lstStyle/>
+                    <a:p>
+                      <a:pPr algn="l"/>
+                      <a:r>
+                        <a:rPr sz="1200">
+                          <a:solidFill>
+                            <a:srgbClr val="333333"/>
+                          </a:solidFill>
+                        </a:rPr>
+                        <a:t>Time horizon</a:t>
+                      </a:r>
+                    </a:p>
+                  </a:txBody>
+                  <a:tcPr>
+                    <a:solidFill>
+                      <a:srgbClr val="F2F2F2"/>
+                    </a:solidFill>
+                  </a:tcPr>
+                </a:tc>
+                <a:tc>
+                  <a:txBody>
+                    <a:bodyPr/>
+                    <a:lstStyle/>
+                    <a:p>
+                      <a:pPr algn="ctr"/>
+                      <a:r>
+                        <a:rPr sz="1200">
+                          <a:solidFill>
+                            <a:srgbClr val="333333"/>
+                          </a:solidFill>
+                        </a:rPr>
+                        <a:t>Year 1–2 commit</a:t>
+                      </a:r>
+                    </a:p>
+                  </a:txBody>
+                  <a:tcPr>
+                    <a:solidFill>
+                      <a:srgbClr val="F2F2F2"/>
+                    </a:solidFill>
+                  </a:tcPr>
+                </a:tc>
+                <a:tc>
+                  <a:txBody>
+                    <a:bodyPr/>
+                    <a:lstStyle/>
+                    <a:p>
+                      <a:pPr algn="ctr"/>
+                      <a:r>
+                        <a:rPr sz="1200">
+                          <a:solidFill>
+                            <a:srgbClr val="333333"/>
+                          </a:solidFill>
+                        </a:rPr>
+                        <a:t>Year 3+ aspiration</a:t>
+                      </a:r>
+                    </a:p>
+                  </a:txBody>
+                  <a:tcPr>
+                    <a:solidFill>
+                      <a:srgbClr val="F2F2F2"/>
+                    </a:solidFill>
+                  </a:tcPr>
+                </a:tc>
+              </a:tr>
+              <a:tr h="411480">
+                <a:tc>
+                  <a:txBody>
+                    <a:bodyPr/>
+                    <a:lstStyle/>
+                    <a:p>
+                      <a:pPr algn="l"/>
+                      <a:r>
+                        <a:rPr sz="1200">
+                          <a:solidFill>
+                            <a:srgbClr val="333333"/>
+                          </a:solidFill>
+                        </a:rPr>
+                        <a:t>Same QC pass / same Phase-4 calibration?</a:t>
+                      </a:r>
+                    </a:p>
+                  </a:txBody>
+                  <a:tcPr>
+                    <a:solidFill>
+                      <a:srgbClr val="FFFFFF"/>
+                    </a:solidFill>
+                  </a:tcPr>
+                </a:tc>
+                <a:tc>
+                  <a:txBody>
+                    <a:bodyPr/>
+                    <a:lstStyle/>
+                    <a:p>
+                      <a:pPr algn="ctr"/>
+                      <a:r>
+                        <a:rPr sz="1200">
+                          <a:solidFill>
+                            <a:srgbClr val="333333"/>
+                          </a:solidFill>
+                        </a:rPr>
+                        <a:t>Yes ✓</a:t>
+                      </a:r>
+                    </a:p>
+                  </a:txBody>
+                  <a:tcPr>
+                    <a:solidFill>
+                      <a:srgbClr val="FFFFFF"/>
+                    </a:solidFill>
+                  </a:tcPr>
+                </a:tc>
+                <a:tc>
+                  <a:txBody>
+                    <a:bodyPr/>
+                    <a:lstStyle/>
+                    <a:p>
+                      <a:pPr algn="ctr"/>
+                      <a:r>
+                        <a:rPr sz="1200">
+                          <a:solidFill>
+                            <a:srgbClr val="333333"/>
+                          </a:solidFill>
+                        </a:rPr>
+                        <a:t>Yes ✓</a:t>
                       </a:r>
                     </a:p>
                   </a:txBody>
@@ -3669,6 +3940,59 @@
       <p:sp>
         <p:nvSpPr>
           <p:cNvPr id="4" name="TextBox 3"/>
+          <p:cNvSpPr txBox="1"/>
+          <p:nvPr/>
+        </p:nvSpPr>
+        <p:spPr>
+          <a:xfrm>
+            <a:off x="548640" y="5029200"/>
+            <a:ext cx="10972800" cy="5029200"/>
+          </a:xfrm>
+          <a:prstGeom prst="rect">
+            <a:avLst/>
+          </a:prstGeom>
+          <a:noFill/>
+        </p:spPr>
+        <p:txBody>
+          <a:bodyPr wrap="square">
+            <a:spAutoFit/>
+          </a:bodyPr>
+          <a:lstStyle/>
+          <a:p>
+            <a:pPr algn="l">
+              <a:spcAft>
+                <a:spcPts val="800"/>
+              </a:spcAft>
+            </a:pPr>
+            <a:r>
+              <a:rPr sz="1400">
+                <a:solidFill>
+                  <a:srgbClr val="333333"/>
+                </a:solidFill>
+              </a:rPr>
+              <a:t>Both plans use exactly the same data and the same engine — only the headway target on non-SSCL trunks and MP feeders differs.</a:t>
+            </a:r>
+          </a:p>
+          <a:p>
+            <a:pPr algn="l">
+              <a:spcAft>
+                <a:spcPts val="800"/>
+              </a:spcAft>
+            </a:pPr>
+            <a:r>
+              <a:rPr sz="1400">
+                <a:solidFill>
+                  <a:srgbClr val="333333"/>
+                </a:solidFill>
+              </a:rPr>
+              <a:t>Phase-1 is the realistic first commit; phase-2 is the ambition once operator absorption is settled and depot capacity is built out.</a:t>
+            </a:r>
+          </a:p>
+        </p:txBody>
+      </p:sp>
+      <p:sp>
+        <p:nvSpPr>
+          <p:cNvPr id="5" name="TextBox 4"/>
           <p:cNvSpPr txBox="1"/>
           <p:nvPr/>
         </p:nvSpPr>
@@ -3695,7 +4019,7 @@
                   <a:srgbClr val="333333"/>
                 </a:solidFill>
               </a:rPr>
-              <a:t>Slide 10  •  Risk register</a:t>
+              <a:t>Slide 9b  •  Service-level decision</a:t>
             </a:r>
           </a:p>
         </p:txBody>
@@ -3764,7 +4088,7 @@
                   <a:srgbClr val="FFFFFF"/>
                 </a:solidFill>
               </a:rPr>
-              <a:t>What we ask of you</a:t>
+              <a:t>Companion RTO workbook</a:t>
             </a:r>
           </a:p>
         </p:txBody>
@@ -3797,12 +4121,12 @@
               </a:spcAft>
             </a:pPr>
             <a:r>
-              <a:rPr sz="1800">
+              <a:rPr sz="1400">
                 <a:solidFill>
                   <a:srgbClr val="333333"/>
                 </a:solidFill>
               </a:rPr>
-              <a:t>1. Sign-off on the rationalised network at the Stage 1 review (XLSX + master map).</a:t>
+              <a:t>An RTO-Ready Master Excel Workbook ships alongside this plan:</a:t>
             </a:r>
           </a:p>
           <a:p>
@@ -3812,12 +4136,12 @@
               </a:spcAft>
             </a:pPr>
             <a:r>
-              <a:rPr sz="1800">
+              <a:rPr sz="1400">
                 <a:solidFill>
                   <a:srgbClr val="333333"/>
                 </a:solidFill>
               </a:rPr>
-              <a:t>2. Authorise the operator-consultation process with All J&amp;K Transport Welfare Association.</a:t>
+              <a:t>  • Kashmir_Route_Frequency_Plan_v3.3.5_RTO.xlsx (9 sheets)</a:t>
             </a:r>
           </a:p>
           <a:p>
@@ -3827,12 +4151,12 @@
               </a:spcAft>
             </a:pPr>
             <a:r>
-              <a:rPr sz="1800">
+              <a:rPr sz="1400">
                 <a:solidFill>
                   <a:srgbClr val="333333"/>
                 </a:solidFill>
               </a:rPr>
-              <a:t>3. Approve a phased rollout starting with the SSCL backbone + trunk corridors.</a:t>
+              <a:t> </a:t>
             </a:r>
           </a:p>
           <a:p>
@@ -3842,12 +4166,12 @@
               </a:spcAft>
             </a:pPr>
             <a:r>
-              <a:rPr sz="1800">
+              <a:rPr sz="1400">
                 <a:solidFill>
                   <a:srgbClr val="333333"/>
                 </a:solidFill>
               </a:rPr>
-              <a:t>4. Confirm a monthly recalibration cycle against CHALO ridership data.</a:t>
+              <a:t>Sheet 1 — Cover &amp; Sign-off block for Principal Secretary, MD SSCL, Director JKRTC, and the concerned RTO.</a:t>
             </a:r>
           </a:p>
           <a:p>
@@ -3857,12 +4181,72 @@
               </a:spcAft>
             </a:pPr>
             <a:r>
-              <a:rPr sz="1800">
+              <a:rPr sz="1400">
                 <a:solidFill>
                   <a:srgbClr val="333333"/>
                 </a:solidFill>
               </a:rPr>
-              <a:t>5. Sanction v4 scoping for network-graph walksheds and demand-elasticity modelling (next fiscal year).</a:t>
+              <a:t>Sheet 3 — Route-Level Plan (frozen identity columns, auto-filter, colour-coded Load_Flag, hyperlink to per-route map).</a:t>
+            </a:r>
+          </a:p>
+          <a:p>
+            <a:pPr algn="l">
+              <a:spcAft>
+                <a:spcPts val="800"/>
+              </a:spcAft>
+            </a:pPr>
+            <a:r>
+              <a:rPr sz="1400">
+                <a:solidFill>
+                  <a:srgbClr val="333333"/>
+                </a:solidFill>
+              </a:rPr>
+              <a:t>Sheet 4 — Operator Absorption Register with starting buyback-cost estimates (₹15 L private minibus / ₹3 L LPV / ₹50 L HPV).</a:t>
+            </a:r>
+          </a:p>
+          <a:p>
+            <a:pPr algn="l">
+              <a:spcAft>
+                <a:spcPts val="800"/>
+              </a:spcAft>
+            </a:pPr>
+            <a:r>
+              <a:rPr sz="1400">
+                <a:solidFill>
+                  <a:srgbClr val="333333"/>
+                </a:solidFill>
+              </a:rPr>
+              <a:t>Sheet 5 — Trunk Network Detail.   Sheet 6 — Social Obligation routes.   Sheet 7 — Tourist &amp; Seasonal routes.</a:t>
+            </a:r>
+          </a:p>
+          <a:p>
+            <a:pPr algn="l">
+              <a:spcAft>
+                <a:spcPts val="800"/>
+              </a:spcAft>
+            </a:pPr>
+            <a:r>
+              <a:rPr sz="1400">
+                <a:solidFill>
+                  <a:srgbClr val="333333"/>
+                </a:solidFill>
+              </a:rPr>
+              <a:t>Sheet 8 — Calibration &amp; Sources transparency.   Sheet 9 — Known Limitations and Phase-2 backlog.</a:t>
+            </a:r>
+          </a:p>
+          <a:p>
+            <a:pPr algn="l">
+              <a:spcAft>
+                <a:spcPts val="800"/>
+              </a:spcAft>
+            </a:pPr>
+            <a:r>
+              <a:rPr sz="1400">
+                <a:solidFill>
+                  <a:srgbClr val="333333"/>
+                </a:solidFill>
+              </a:rPr>
+              <a:t>Designed for paper review (landscape A3 print, repeat header rows) and Excel filtering side by side.</a:t>
             </a:r>
           </a:p>
         </p:txBody>
@@ -3896,7 +4280,7 @@
                   <a:srgbClr val="333333"/>
                 </a:solidFill>
               </a:rPr>
-              <a:t>Slide 11  •  Asks</a:t>
+              <a:t>Slide 9c  •  Companion workbook</a:t>
             </a:r>
           </a:p>
         </p:txBody>
@@ -3910,6 +4294,411 @@
 </file>
 
 <file path=ppt/slides/slide12.xml><?xml version="1.0" encoding="utf-8"?>
+<p:sld xmlns:a="http://schemas.openxmlformats.org/drawingml/2006/main" xmlns:p="http://schemas.openxmlformats.org/presentationml/2006/main" xmlns:r="http://schemas.openxmlformats.org/officeDocument/2006/relationships">
+  <p:cSld>
+    <p:spTree>
+      <p:nvGrpSpPr>
+        <p:cNvPr id="1" name=""/>
+        <p:cNvGrpSpPr/>
+        <p:nvPr/>
+      </p:nvGrpSpPr>
+      <p:grpSpPr/>
+      <p:sp>
+        <p:nvSpPr>
+          <p:cNvPr id="2" name="Rectangle 1"/>
+          <p:cNvSpPr/>
+          <p:nvPr/>
+        </p:nvSpPr>
+        <p:spPr>
+          <a:xfrm>
+            <a:off x="0" y="0"/>
+            <a:ext cx="12191695" cy="822960"/>
+          </a:xfrm>
+          <a:prstGeom prst="rect">
+            <a:avLst/>
+          </a:prstGeom>
+          <a:solidFill>
+            <a:srgbClr val="D32F2F"/>
+          </a:solidFill>
+          <a:ln>
+            <a:noFill/>
+          </a:ln>
+        </p:spPr>
+        <p:style>
+          <a:lnRef idx="1">
+            <a:schemeClr val="accent1"/>
+          </a:lnRef>
+          <a:fillRef idx="3">
+            <a:schemeClr val="accent1"/>
+          </a:fillRef>
+          <a:effectRef idx="2">
+            <a:schemeClr val="accent1"/>
+          </a:effectRef>
+          <a:fontRef idx="minor">
+            <a:schemeClr val="lt1"/>
+          </a:fontRef>
+        </p:style>
+        <p:txBody>
+          <a:bodyPr rtlCol="0" anchor="ctr" lIns="365760" tIns="164592"/>
+          <a:lstStyle/>
+          <a:p>
+            <a:pPr algn="l"/>
+            <a:r>
+              <a:rPr sz="2800" b="1">
+                <a:solidFill>
+                  <a:srgbClr val="FFFFFF"/>
+                </a:solidFill>
+              </a:rPr>
+              <a:t>Risks and how the plan mitigates them</a:t>
+            </a:r>
+          </a:p>
+        </p:txBody>
+      </p:sp>
+      <p:graphicFrame>
+        <p:nvGraphicFramePr>
+          <p:cNvPr id="3" name="Table 2"/>
+          <p:cNvGraphicFramePr>
+            <a:graphicFrameLocks noGrp="1"/>
+          </p:cNvGraphicFramePr>
+          <p:nvPr/>
+        </p:nvGraphicFramePr>
+        <p:xfrm>
+          <a:off x="548640" y="1280160"/>
+          <a:ext cx="10972800" cy="2468880"/>
+        </p:xfrm>
+        <a:graphic>
+          <a:graphicData uri="http://schemas.openxmlformats.org/drawingml/2006/table">
+            <a:tbl>
+              <a:tblPr firstRow="1" bandRow="1">
+                <a:tableStyleId>{5C22544A-7EE6-4342-B048-85BDC9FD1C3A}</a:tableStyleId>
+              </a:tblPr>
+              <a:tblGrid>
+                <a:gridCol w="5486400"/>
+                <a:gridCol w="5486400"/>
+              </a:tblGrid>
+              <a:tr h="411480">
+                <a:tc>
+                  <a:txBody>
+                    <a:bodyPr/>
+                    <a:lstStyle/>
+                    <a:p>
+                      <a:pPr algn="ctr"/>
+                      <a:r>
+                        <a:rPr sz="1400" b="1">
+                          <a:solidFill>
+                            <a:srgbClr val="FFFFFF"/>
+                          </a:solidFill>
+                        </a:rPr>
+                        <a:t>Risk</a:t>
+                      </a:r>
+                    </a:p>
+                  </a:txBody>
+                  <a:tcPr>
+                    <a:solidFill>
+                      <a:srgbClr val="1A237E"/>
+                    </a:solidFill>
+                  </a:tcPr>
+                </a:tc>
+                <a:tc>
+                  <a:txBody>
+                    <a:bodyPr/>
+                    <a:lstStyle/>
+                    <a:p>
+                      <a:pPr algn="ctr"/>
+                      <a:r>
+                        <a:rPr sz="1400" b="1">
+                          <a:solidFill>
+                            <a:srgbClr val="FFFFFF"/>
+                          </a:solidFill>
+                        </a:rPr>
+                        <a:t>Mitigation in the plan</a:t>
+                      </a:r>
+                    </a:p>
+                  </a:txBody>
+                  <a:tcPr>
+                    <a:solidFill>
+                      <a:srgbClr val="1A237E"/>
+                    </a:solidFill>
+                  </a:tcPr>
+                </a:tc>
+              </a:tr>
+              <a:tr h="411480">
+                <a:tc>
+                  <a:txBody>
+                    <a:bodyPr/>
+                    <a:lstStyle/>
+                    <a:p>
+                      <a:pPr algn="l"/>
+                      <a:r>
+                        <a:rPr sz="1200">
+                          <a:solidFill>
+                            <a:srgbClr val="333333"/>
+                          </a:solidFill>
+                        </a:rPr>
+                        <a:t>Operator backlash on absorbed permits</a:t>
+                      </a:r>
+                    </a:p>
+                  </a:txBody>
+                  <a:tcPr>
+                    <a:solidFill>
+                      <a:srgbClr val="FFFFFF"/>
+                    </a:solidFill>
+                  </a:tcPr>
+                </a:tc>
+                <a:tc>
+                  <a:txBody>
+                    <a:bodyPr/>
+                    <a:lstStyle/>
+                    <a:p>
+                      <a:pPr algn="ctr"/>
+                      <a:r>
+                        <a:rPr sz="1200">
+                          <a:solidFill>
+                            <a:srgbClr val="333333"/>
+                          </a:solidFill>
+                        </a:rPr>
+                        <a:t>Per-permit displacement log + buyback recommendation; consultation pre-rollout.</a:t>
+                      </a:r>
+                    </a:p>
+                  </a:txBody>
+                  <a:tcPr>
+                    <a:solidFill>
+                      <a:srgbClr val="FFFFFF"/>
+                    </a:solidFill>
+                  </a:tcPr>
+                </a:tc>
+              </a:tr>
+              <a:tr h="411480">
+                <a:tc>
+                  <a:txBody>
+                    <a:bodyPr/>
+                    <a:lstStyle/>
+                    <a:p>
+                      <a:pPr algn="l"/>
+                      <a:r>
+                        <a:rPr sz="1200">
+                          <a:solidFill>
+                            <a:srgbClr val="333333"/>
+                          </a:solidFill>
+                        </a:rPr>
+                        <a:t>Winter service collapse on tourist routes</a:t>
+                      </a:r>
+                    </a:p>
+                  </a:txBody>
+                  <a:tcPr>
+                    <a:solidFill>
+                      <a:srgbClr val="F2F2F2"/>
+                    </a:solidFill>
+                  </a:tcPr>
+                </a:tc>
+                <a:tc>
+                  <a:txBody>
+                    <a:bodyPr/>
+                    <a:lstStyle/>
+                    <a:p>
+                      <a:pPr algn="ctr"/>
+                      <a:r>
+                        <a:rPr sz="1200">
+                          <a:solidFill>
+                            <a:srgbClr val="333333"/>
+                          </a:solidFill>
+                        </a:rPr>
+                        <a:t>Separate winter scenario; Social_Flag protects lifelines.</a:t>
+                      </a:r>
+                    </a:p>
+                  </a:txBody>
+                  <a:tcPr>
+                    <a:solidFill>
+                      <a:srgbClr val="F2F2F2"/>
+                    </a:solidFill>
+                  </a:tcPr>
+                </a:tc>
+              </a:tr>
+              <a:tr h="411480">
+                <a:tc>
+                  <a:txBody>
+                    <a:bodyPr/>
+                    <a:lstStyle/>
+                    <a:p>
+                      <a:pPr algn="l"/>
+                      <a:r>
+                        <a:rPr sz="1200">
+                          <a:solidFill>
+                            <a:srgbClr val="333333"/>
+                          </a:solidFill>
+                        </a:rPr>
+                        <a:t>Over-supply under static demand model</a:t>
+                      </a:r>
+                    </a:p>
+                  </a:txBody>
+                  <a:tcPr>
+                    <a:solidFill>
+                      <a:srgbClr val="FFFFFF"/>
+                    </a:solidFill>
+                  </a:tcPr>
+                </a:tc>
+                <a:tc>
+                  <a:txBody>
+                    <a:bodyPr/>
+                    <a:lstStyle/>
+                    <a:p>
+                      <a:pPr algn="ctr"/>
+                      <a:r>
+                        <a:rPr sz="1200">
+                          <a:solidFill>
+                            <a:srgbClr val="333333"/>
+                          </a:solidFill>
+                        </a:rPr>
+                        <a:t>Phased rollout — start with trunk corridors only; expand on observed ridership.</a:t>
+                      </a:r>
+                    </a:p>
+                  </a:txBody>
+                  <a:tcPr>
+                    <a:solidFill>
+                      <a:srgbClr val="FFFFFF"/>
+                    </a:solidFill>
+                  </a:tcPr>
+                </a:tc>
+              </a:tr>
+              <a:tr h="411480">
+                <a:tc>
+                  <a:txBody>
+                    <a:bodyPr/>
+                    <a:lstStyle/>
+                    <a:p>
+                      <a:pPr algn="l"/>
+                      <a:r>
+                        <a:rPr sz="1200">
+                          <a:solidFill>
+                            <a:srgbClr val="333333"/>
+                          </a:solidFill>
+                        </a:rPr>
+                        <a:t>Calibration drift over time</a:t>
+                      </a:r>
+                    </a:p>
+                  </a:txBody>
+                  <a:tcPr>
+                    <a:solidFill>
+                      <a:srgbClr val="F2F2F2"/>
+                    </a:solidFill>
+                  </a:tcPr>
+                </a:tc>
+                <a:tc>
+                  <a:txBody>
+                    <a:bodyPr/>
+                    <a:lstStyle/>
+                    <a:p>
+                      <a:pPr algn="ctr"/>
+                      <a:r>
+                        <a:rPr sz="1200">
+                          <a:solidFill>
+                            <a:srgbClr val="333333"/>
+                          </a:solidFill>
+                        </a:rPr>
+                        <a:t>Monthly cross_evaluate vs CHALO; one-line CAPTURE_SCALE recalibration.</a:t>
+                      </a:r>
+                    </a:p>
+                  </a:txBody>
+                  <a:tcPr>
+                    <a:solidFill>
+                      <a:srgbClr val="F2F2F2"/>
+                    </a:solidFill>
+                  </a:tcPr>
+                </a:tc>
+              </a:tr>
+              <a:tr h="411480">
+                <a:tc>
+                  <a:txBody>
+                    <a:bodyPr/>
+                    <a:lstStyle/>
+                    <a:p>
+                      <a:pPr algn="l"/>
+                      <a:r>
+                        <a:rPr sz="1200">
+                          <a:solidFill>
+                            <a:srgbClr val="333333"/>
+                          </a:solidFill>
+                        </a:rPr>
+                        <a:t>Map tile / boundary sensitivity</a:t>
+                      </a:r>
+                    </a:p>
+                  </a:txBody>
+                  <a:tcPr>
+                    <a:solidFill>
+                      <a:srgbClr val="FFFFFF"/>
+                    </a:solidFill>
+                  </a:tcPr>
+                </a:tc>
+                <a:tc>
+                  <a:txBody>
+                    <a:bodyPr/>
+                    <a:lstStyle/>
+                    <a:p>
+                      <a:pPr algn="ctr"/>
+                      <a:r>
+                        <a:rPr sz="1200">
+                          <a:solidFill>
+                            <a:srgbClr val="333333"/>
+                          </a:solidFill>
+                        </a:rPr>
+                        <a:t>Built-in disclaimer (CartoDB / OSM tiles do not represent India's official J&amp;K boundary).</a:t>
+                      </a:r>
+                    </a:p>
+                  </a:txBody>
+                  <a:tcPr>
+                    <a:solidFill>
+                      <a:srgbClr val="FFFFFF"/>
+                    </a:solidFill>
+                  </a:tcPr>
+                </a:tc>
+              </a:tr>
+            </a:tbl>
+          </a:graphicData>
+        </a:graphic>
+      </p:graphicFrame>
+      <p:sp>
+        <p:nvSpPr>
+          <p:cNvPr id="4" name="TextBox 3"/>
+          <p:cNvSpPr txBox="1"/>
+          <p:nvPr/>
+        </p:nvSpPr>
+        <p:spPr>
+          <a:xfrm>
+            <a:off x="365760" y="6400800"/>
+            <a:ext cx="11430000" cy="274320"/>
+          </a:xfrm>
+          <a:prstGeom prst="rect">
+            <a:avLst/>
+          </a:prstGeom>
+          <a:noFill/>
+        </p:spPr>
+        <p:txBody>
+          <a:bodyPr wrap="none">
+            <a:spAutoFit/>
+          </a:bodyPr>
+          <a:lstStyle/>
+          <a:p>
+            <a:pPr algn="l"/>
+            <a:r>
+              <a:rPr sz="1000" i="1">
+                <a:solidFill>
+                  <a:srgbClr val="333333"/>
+                </a:solidFill>
+              </a:rPr>
+              <a:t>Slide 10  •  Risk register</a:t>
+            </a:r>
+          </a:p>
+        </p:txBody>
+      </p:sp>
+    </p:spTree>
+  </p:cSld>
+  <p:clrMapOvr>
+    <a:masterClrMapping/>
+  </p:clrMapOvr>
+</p:sld>
+</file>
+
+<file path=ppt/slides/slide13.xml><?xml version="1.0" encoding="utf-8"?>
 <p:sld xmlns:a="http://schemas.openxmlformats.org/drawingml/2006/main" xmlns:p="http://schemas.openxmlformats.org/presentationml/2006/main" xmlns:r="http://schemas.openxmlformats.org/officeDocument/2006/relationships">
   <p:cSld>
     <p:spTree>
@@ -3965,6 +4754,207 @@
                   <a:srgbClr val="FFFFFF"/>
                 </a:solidFill>
               </a:rPr>
+              <a:t>What we ask of you</a:t>
+            </a:r>
+          </a:p>
+        </p:txBody>
+      </p:sp>
+      <p:sp>
+        <p:nvSpPr>
+          <p:cNvPr id="3" name="TextBox 2"/>
+          <p:cNvSpPr txBox="1"/>
+          <p:nvPr/>
+        </p:nvSpPr>
+        <p:spPr>
+          <a:xfrm>
+            <a:off x="548640" y="1097280"/>
+            <a:ext cx="10972800" cy="5029200"/>
+          </a:xfrm>
+          <a:prstGeom prst="rect">
+            <a:avLst/>
+          </a:prstGeom>
+          <a:noFill/>
+        </p:spPr>
+        <p:txBody>
+          <a:bodyPr wrap="square">
+            <a:spAutoFit/>
+          </a:bodyPr>
+          <a:lstStyle/>
+          <a:p>
+            <a:pPr algn="l">
+              <a:spcAft>
+                <a:spcPts val="800"/>
+              </a:spcAft>
+            </a:pPr>
+            <a:r>
+              <a:rPr sz="1800">
+                <a:solidFill>
+                  <a:srgbClr val="333333"/>
+                </a:solidFill>
+              </a:rPr>
+              <a:t>1. Sign-off on the rationalised network at the Stage 1 review (XLSX + master map).</a:t>
+            </a:r>
+          </a:p>
+          <a:p>
+            <a:pPr algn="l">
+              <a:spcAft>
+                <a:spcPts val="800"/>
+              </a:spcAft>
+            </a:pPr>
+            <a:r>
+              <a:rPr sz="1800">
+                <a:solidFill>
+                  <a:srgbClr val="333333"/>
+                </a:solidFill>
+              </a:rPr>
+              <a:t>2. Authorise the operator-consultation process with All J&amp;K Transport Welfare Association.</a:t>
+            </a:r>
+          </a:p>
+          <a:p>
+            <a:pPr algn="l">
+              <a:spcAft>
+                <a:spcPts val="800"/>
+              </a:spcAft>
+            </a:pPr>
+            <a:r>
+              <a:rPr sz="1800">
+                <a:solidFill>
+                  <a:srgbClr val="333333"/>
+                </a:solidFill>
+              </a:rPr>
+              <a:t>3. Approve a phased rollout starting with the SSCL backbone + trunk corridors.</a:t>
+            </a:r>
+          </a:p>
+          <a:p>
+            <a:pPr algn="l">
+              <a:spcAft>
+                <a:spcPts val="800"/>
+              </a:spcAft>
+            </a:pPr>
+            <a:r>
+              <a:rPr sz="1800">
+                <a:solidFill>
+                  <a:srgbClr val="333333"/>
+                </a:solidFill>
+              </a:rPr>
+              <a:t>4. Confirm a monthly recalibration cycle against CHALO ridership data.</a:t>
+            </a:r>
+          </a:p>
+          <a:p>
+            <a:pPr algn="l">
+              <a:spcAft>
+                <a:spcPts val="800"/>
+              </a:spcAft>
+            </a:pPr>
+            <a:r>
+              <a:rPr sz="1800">
+                <a:solidFill>
+                  <a:srgbClr val="333333"/>
+                </a:solidFill>
+              </a:rPr>
+              <a:t>5. Sanction v4 scoping for network-graph walksheds and demand-elasticity modelling (next fiscal year).</a:t>
+            </a:r>
+          </a:p>
+        </p:txBody>
+      </p:sp>
+      <p:sp>
+        <p:nvSpPr>
+          <p:cNvPr id="4" name="TextBox 3"/>
+          <p:cNvSpPr txBox="1"/>
+          <p:nvPr/>
+        </p:nvSpPr>
+        <p:spPr>
+          <a:xfrm>
+            <a:off x="365760" y="6400800"/>
+            <a:ext cx="11430000" cy="274320"/>
+          </a:xfrm>
+          <a:prstGeom prst="rect">
+            <a:avLst/>
+          </a:prstGeom>
+          <a:noFill/>
+        </p:spPr>
+        <p:txBody>
+          <a:bodyPr wrap="none">
+            <a:spAutoFit/>
+          </a:bodyPr>
+          <a:lstStyle/>
+          <a:p>
+            <a:pPr algn="l"/>
+            <a:r>
+              <a:rPr sz="1000" i="1">
+                <a:solidFill>
+                  <a:srgbClr val="333333"/>
+                </a:solidFill>
+              </a:rPr>
+              <a:t>Slide 11  •  Asks</a:t>
+            </a:r>
+          </a:p>
+        </p:txBody>
+      </p:sp>
+    </p:spTree>
+  </p:cSld>
+  <p:clrMapOvr>
+    <a:masterClrMapping/>
+  </p:clrMapOvr>
+</p:sld>
+</file>
+
+<file path=ppt/slides/slide14.xml><?xml version="1.0" encoding="utf-8"?>
+<p:sld xmlns:a="http://schemas.openxmlformats.org/drawingml/2006/main" xmlns:p="http://schemas.openxmlformats.org/presentationml/2006/main" xmlns:r="http://schemas.openxmlformats.org/officeDocument/2006/relationships">
+  <p:cSld>
+    <p:spTree>
+      <p:nvGrpSpPr>
+        <p:cNvPr id="1" name=""/>
+        <p:cNvGrpSpPr/>
+        <p:nvPr/>
+      </p:nvGrpSpPr>
+      <p:grpSpPr/>
+      <p:sp>
+        <p:nvSpPr>
+          <p:cNvPr id="2" name="Rectangle 1"/>
+          <p:cNvSpPr/>
+          <p:nvPr/>
+        </p:nvSpPr>
+        <p:spPr>
+          <a:xfrm>
+            <a:off x="0" y="0"/>
+            <a:ext cx="12191695" cy="822960"/>
+          </a:xfrm>
+          <a:prstGeom prst="rect">
+            <a:avLst/>
+          </a:prstGeom>
+          <a:solidFill>
+            <a:srgbClr val="1A237E"/>
+          </a:solidFill>
+          <a:ln>
+            <a:noFill/>
+          </a:ln>
+        </p:spPr>
+        <p:style>
+          <a:lnRef idx="1">
+            <a:schemeClr val="accent1"/>
+          </a:lnRef>
+          <a:fillRef idx="3">
+            <a:schemeClr val="accent1"/>
+          </a:fillRef>
+          <a:effectRef idx="2">
+            <a:schemeClr val="accent1"/>
+          </a:effectRef>
+          <a:fontRef idx="minor">
+            <a:schemeClr val="lt1"/>
+          </a:fontRef>
+        </p:style>
+        <p:txBody>
+          <a:bodyPr rtlCol="0" anchor="ctr" lIns="365760" tIns="164592"/>
+          <a:lstStyle/>
+          <a:p>
+            <a:pPr algn="l"/>
+            <a:r>
+              <a:rPr sz="2800" b="1">
+                <a:solidFill>
+                  <a:srgbClr val="FFFFFF"/>
+                </a:solidFill>
+              </a:rPr>
               <a:t>Thank you</a:t>
             </a:r>
           </a:p>
@@ -4495,7 +5485,7 @@
                   <a:srgbClr val="333333"/>
                 </a:solidFill>
               </a:rPr>
-              <a:t>Allocated fleet at a 15-minute target headway on trunks (matches the SSCL e-bus operational standard).</a:t>
+              <a:t>Allocated fleet at conservative phase-1 headways — SSCL backbone at 15 min (their published target), other trunks at 20 min, feeders at 35 min.</a:t>
             </a:r>
           </a:p>
           <a:p>

--- a/Kashmir_Transit_Government_Briefing.pptx
+++ b/Kashmir_Transit_Government_Briefing.pptx
@@ -5772,7 +5772,7 @@
                             <a:srgbClr val="333333"/>
                           </a:solidFill>
                         </a:rPr>
-                        <a:t>988 buses  (HPV 138  /  MPV 730  /  LPV 153)</a:t>
+                        <a:t>1003 buses  (HPV 84  /  MPV 797  /  LPV 153)</a:t>
                       </a:r>
                     </a:p>
                   </a:txBody>
@@ -6381,7 +6381,7 @@
                             <a:srgbClr val="333333"/>
                           </a:solidFill>
                         </a:rPr>
-                        <a:t>34,796 pax</a:t>
+                        <a:t>34,647 pax</a:t>
                       </a:r>
                     </a:p>
                   </a:txBody>
@@ -6403,7 +6403,7 @@
                             <a:srgbClr val="333333"/>
                           </a:solidFill>
                         </a:rPr>
-                        <a:t>+9.2%  within ±10%  ✓</a:t>
+                        <a:t>+8.7%  within ±10%  ✓</a:t>
                       </a:r>
                     </a:p>
                   </a:txBody>
